--- a/연구/소통학회/생성형 인공지능의 위험 인식 구조와 문화적 원형.pptx
+++ b/연구/소통학회/생성형 인공지능의 위험 인식 구조와 문화적 원형.pptx
@@ -240,7 +240,7 @@
           <a:p>
             <a:fld id="{59CB8D08-34DA-4F78-8F9A-57C08BEFE083}" type="datetimeFigureOut">
               <a:rPr lang="ko-KR" altLang="en-US" smtClean="0"/>
-              <a:t>2026-05-20</a:t>
+              <a:t>2026-05-21</a:t>
             </a:fld>
             <a:endParaRPr lang="ko-KR" altLang="en-US"/>
           </a:p>
@@ -5163,7 +5163,7 @@
           <a:p>
             <a:fld id="{1C8322F6-1C60-46CF-968C-BC20E470F443}" type="datetimeFigureOut">
               <a:rPr lang="en-US" smtClean="0"/>
-              <a:t>5/20/2026</a:t>
+              <a:t>5/21/2026</a:t>
             </a:fld>
             <a:endParaRPr lang="en-US"/>
           </a:p>
@@ -5497,7 +5497,7 @@
           <a:p>
             <a:fld id="{1C8322F6-1C60-46CF-968C-BC20E470F443}" type="datetimeFigureOut">
               <a:rPr lang="en-US" smtClean="0"/>
-              <a:t>5/20/2026</a:t>
+              <a:t>5/21/2026</a:t>
             </a:fld>
             <a:endParaRPr lang="en-US"/>
           </a:p>
@@ -5750,7 +5750,7 @@
           <a:p>
             <a:fld id="{1C8322F6-1C60-46CF-968C-BC20E470F443}" type="datetimeFigureOut">
               <a:rPr lang="en-US" smtClean="0"/>
-              <a:t>5/20/2026</a:t>
+              <a:t>5/21/2026</a:t>
             </a:fld>
             <a:endParaRPr lang="en-US"/>
           </a:p>
@@ -6084,7 +6084,7 @@
           <a:p>
             <a:fld id="{1C8322F6-1C60-46CF-968C-BC20E470F443}" type="datetimeFigureOut">
               <a:rPr lang="en-US" smtClean="0"/>
-              <a:t>5/20/2026</a:t>
+              <a:t>5/21/2026</a:t>
             </a:fld>
             <a:endParaRPr lang="en-US"/>
           </a:p>
@@ -6365,7 +6365,7 @@
           <a:p>
             <a:fld id="{1C8322F6-1C60-46CF-968C-BC20E470F443}" type="datetimeFigureOut">
               <a:rPr lang="en-US" smtClean="0"/>
-              <a:t>5/20/2026</a:t>
+              <a:t>5/21/2026</a:t>
             </a:fld>
             <a:endParaRPr lang="en-US"/>
           </a:p>
@@ -6767,7 +6767,7 @@
           <a:p>
             <a:fld id="{1C8322F6-1C60-46CF-968C-BC20E470F443}" type="datetimeFigureOut">
               <a:rPr lang="en-US" smtClean="0"/>
-              <a:t>5/20/2026</a:t>
+              <a:t>5/21/2026</a:t>
             </a:fld>
             <a:endParaRPr lang="en-US"/>
           </a:p>
@@ -7228,7 +7228,7 @@
           <a:p>
             <a:fld id="{1C8322F6-1C60-46CF-968C-BC20E470F443}" type="datetimeFigureOut">
               <a:rPr lang="en-US" smtClean="0"/>
-              <a:t>5/20/2026</a:t>
+              <a:t>5/21/2026</a:t>
             </a:fld>
             <a:endParaRPr lang="en-US"/>
           </a:p>
@@ -7461,7 +7461,7 @@
           <a:p>
             <a:fld id="{1C8322F6-1C60-46CF-968C-BC20E470F443}" type="datetimeFigureOut">
               <a:rPr lang="en-US" smtClean="0"/>
-              <a:t>5/20/2026</a:t>
+              <a:t>5/21/2026</a:t>
             </a:fld>
             <a:endParaRPr lang="en-US"/>
           </a:p>
@@ -7660,7 +7660,7 @@
           <a:p>
             <a:fld id="{1C8322F6-1C60-46CF-968C-BC20E470F443}" type="datetimeFigureOut">
               <a:rPr lang="en-US" smtClean="0"/>
-              <a:t>5/20/2026</a:t>
+              <a:t>5/21/2026</a:t>
             </a:fld>
             <a:endParaRPr lang="en-US"/>
           </a:p>
@@ -7973,7 +7973,7 @@
           <a:p>
             <a:fld id="{1C8322F6-1C60-46CF-968C-BC20E470F443}" type="datetimeFigureOut">
               <a:rPr lang="en-US" smtClean="0"/>
-              <a:t>5/20/2026</a:t>
+              <a:t>5/21/2026</a:t>
             </a:fld>
             <a:endParaRPr lang="en-US"/>
           </a:p>
@@ -8437,7 +8437,7 @@
           <a:p>
             <a:fld id="{1C8322F6-1C60-46CF-968C-BC20E470F443}" type="datetimeFigureOut">
               <a:rPr lang="en-US" smtClean="0"/>
-              <a:t>5/20/2026</a:t>
+              <a:t>5/21/2026</a:t>
             </a:fld>
             <a:endParaRPr lang="en-US"/>
           </a:p>
@@ -8850,7 +8850,7 @@
           <a:p>
             <a:fld id="{1C8322F6-1C60-46CF-968C-BC20E470F443}" type="datetimeFigureOut">
               <a:rPr lang="en-US" smtClean="0"/>
-              <a:t>5/20/2026</a:t>
+              <a:t>5/21/2026</a:t>
             </a:fld>
             <a:endParaRPr lang="en-US"/>
           </a:p>
@@ -17929,7 +17929,7 @@
             <a:pPr lvl="1"/>
             <a:r>
               <a:rPr lang="ko-KR" altLang="en-US" dirty="0"/>
-              <a:t>숙명론</a:t>
+              <a:t>운명주의</a:t>
             </a:r>
             <a:r>
               <a:rPr lang="en-US" altLang="ko-KR" dirty="0"/>
